--- a/assets/powerpoints/module-n3-vetements/B1-quelle-taille.pptx
+++ b/assets/powerpoints/module-n3-vetements/B1-quelle-taille.pptx
@@ -12383,7 +12383,25 @@
                 </a:solidFill>
                 <a:latin typeface="Verdana"/>
               </a:rPr>
-              <a:t>« C'est trop serré &lt;b&gt;aux épaules&lt;/b&gt;. »</a:t>
+              <a:t>« C'est trop serré </a:t>
+            </a:r>
+            <a:r>
+              <a:rPr sz="3400" b="1" i="0">
+                <a:solidFill>
+                  <a:srgbClr val="17181A"/>
+                </a:solidFill>
+                <a:latin typeface="Verdana"/>
+              </a:rPr>
+              <a:t>aux épaules</a:t>
+            </a:r>
+            <a:r>
+              <a:rPr sz="3400" b="0" i="0">
+                <a:solidFill>
+                  <a:srgbClr val="17181A"/>
+                </a:solidFill>
+                <a:latin typeface="Verdana"/>
+              </a:rPr>
+              <a:t>. »</a:t>
             </a:r>
           </a:p>
         </p:txBody>
